--- a/Szakma bemutató.pptx
+++ b/Szakma bemutató.pptx
@@ -4690,29 +4690,7 @@
           <a:p>
             <a:r>
               <a:rPr lang="hu-HU" dirty="0"/>
-              <a:t>A bal oldali szöveget </a:t>
-            </a:r>
-            <a:r>
-              <a:rPr lang="hu-HU" dirty="0" err="1"/>
-              <a:t>row</a:t>
-            </a:r>
-            <a:r>
-              <a:rPr lang="hu-HU" dirty="0"/>
-              <a:t>, col segítségével </a:t>
-            </a:r>
-            <a:r>
-              <a:rPr lang="hu-HU" dirty="0" err="1"/>
-              <a:t>divekbe</a:t>
-            </a:r>
-            <a:r>
-              <a:rPr lang="hu-HU" dirty="0"/>
-              <a:t> helyezve készült</a:t>
-            </a:r>
-          </a:p>
-          <a:p>
-            <a:r>
-              <a:rPr lang="hu-HU" dirty="0"/>
-              <a:t>Az ajánlatkérés rész egy </a:t>
+              <a:t>A kapcsolatot és az ajánlatkérést </a:t>
             </a:r>
             <a:r>
               <a:rPr lang="hu-HU" dirty="0" err="1"/>
@@ -4724,9 +4702,34 @@
             </a:r>
             <a:r>
               <a:rPr lang="hu-HU" dirty="0" err="1"/>
-              <a:t>grid</a:t>
-            </a:r>
-            <a:endParaRPr lang="hu-HU" dirty="0"/>
+              <a:t>griddel</a:t>
+            </a:r>
+            <a:r>
+              <a:rPr lang="hu-HU" dirty="0"/>
+              <a:t> csináltuk, a megadott </a:t>
+            </a:r>
+            <a:r>
+              <a:rPr lang="hu-HU" dirty="0" err="1"/>
+              <a:t>wireframe</a:t>
+            </a:r>
+            <a:r>
+              <a:rPr lang="hu-HU" dirty="0"/>
+              <a:t> alapján.</a:t>
+            </a:r>
+          </a:p>
+          <a:p>
+            <a:r>
+              <a:rPr lang="hu-HU" dirty="0"/>
+              <a:t>ajánlatkérésnél az inputokhoz </a:t>
+            </a:r>
+            <a:r>
+              <a:rPr lang="hu-HU" dirty="0" err="1"/>
+              <a:t>placeholdereket</a:t>
+            </a:r>
+            <a:r>
+              <a:rPr lang="hu-HU" dirty="0"/>
+              <a:t> raktunk, hogy az oldal látogatója tudja, hogy mit és hova kell megadnia.</a:t>
+            </a:r>
           </a:p>
         </p:txBody>
       </p:sp>
@@ -8264,7 +8267,23 @@
             </a:r>
             <a:r>
               <a:rPr lang="hu-HU" dirty="0"/>
-              <a:t> jött létre</a:t>
+              <a:t> jött létre, a </a:t>
+            </a:r>
+            <a:r>
+              <a:rPr lang="hu-HU" dirty="0" err="1"/>
+              <a:t>cardoknak</a:t>
+            </a:r>
+            <a:r>
+              <a:rPr lang="hu-HU" dirty="0"/>
+              <a:t> a széleit </a:t>
+            </a:r>
+            <a:r>
+              <a:rPr lang="hu-HU" dirty="0" err="1"/>
+              <a:t>bootstrapben</a:t>
+            </a:r>
+            <a:r>
+              <a:rPr lang="hu-HU" dirty="0"/>
+              <a:t> lettek meghatározva.</a:t>
             </a:r>
           </a:p>
         </p:txBody>

--- a/Szakma bemutató.pptx
+++ b/Szakma bemutató.pptx
@@ -4319,14 +4319,6 @@
             </a:r>
             <a:r>
               <a:rPr lang="hu-HU" dirty="0" err="1"/>
-              <a:t>section</a:t>
-            </a:r>
-            <a:r>
-              <a:rPr lang="hu-HU" dirty="0"/>
-              <a:t> </a:t>
-            </a:r>
-            <a:r>
-              <a:rPr lang="hu-HU" dirty="0" err="1"/>
               <a:t>cardokkal</a:t>
             </a:r>
             <a:r>
@@ -4720,7 +4712,15 @@
           <a:p>
             <a:r>
               <a:rPr lang="hu-HU" dirty="0"/>
-              <a:t>ajánlatkérésnél az inputokhoz </a:t>
+              <a:t>A</a:t>
+            </a:r>
+            <a:r>
+              <a:rPr lang="hu-HU"/>
+              <a:t>jánlatkérésnél </a:t>
+            </a:r>
+            <a:r>
+              <a:rPr lang="hu-HU" dirty="0"/>
+              <a:t>az inputokhoz </a:t>
             </a:r>
             <a:r>
               <a:rPr lang="hu-HU" dirty="0" err="1"/>
@@ -8267,23 +8267,7 @@
             </a:r>
             <a:r>
               <a:rPr lang="hu-HU" dirty="0"/>
-              <a:t> jött létre, a </a:t>
-            </a:r>
-            <a:r>
-              <a:rPr lang="hu-HU" dirty="0" err="1"/>
-              <a:t>cardoknak</a:t>
-            </a:r>
-            <a:r>
-              <a:rPr lang="hu-HU" dirty="0"/>
-              <a:t> a széleit </a:t>
-            </a:r>
-            <a:r>
-              <a:rPr lang="hu-HU" dirty="0" err="1"/>
-              <a:t>bootstrapben</a:t>
-            </a:r>
-            <a:r>
-              <a:rPr lang="hu-HU" dirty="0"/>
-              <a:t> lettek meghatározva.</a:t>
+              <a:t> készítettük</a:t>
             </a:r>
           </a:p>
         </p:txBody>

--- a/Szakma bemutató.pptx
+++ b/Szakma bemutató.pptx
@@ -8259,7 +8259,7 @@
           <a:p>
             <a:r>
               <a:rPr lang="hu-HU" dirty="0"/>
-              <a:t>A szolgáltatások megvalósítása </a:t>
+              <a:t>A szolgáltatások részt </a:t>
             </a:r>
             <a:r>
               <a:rPr lang="hu-HU" dirty="0" err="1"/>

--- a/Szakma bemutató.pptx
+++ b/Szakma bemutató.pptx
@@ -4330,10 +4330,10 @@
       </p:sp>
       <p:pic>
         <p:nvPicPr>
-          <p:cNvPr id="7" name="Kép 6">
-            <a:extLst>
-              <a:ext uri="{FF2B5EF4-FFF2-40B4-BE49-F238E27FC236}">
-                <a16:creationId xmlns:a16="http://schemas.microsoft.com/office/drawing/2014/main" id="{9A09C154-EC18-4537-AEFB-AFA85C41F54C}"/>
+          <p:cNvPr id="6" name="Kép 5">
+            <a:extLst>
+              <a:ext uri="{FF2B5EF4-FFF2-40B4-BE49-F238E27FC236}">
+                <a16:creationId xmlns:a16="http://schemas.microsoft.com/office/drawing/2014/main" id="{18C5F0B1-4182-4E60-ABE9-2A4810026AD5}"/>
               </a:ext>
             </a:extLst>
           </p:cNvPr>
@@ -4350,8 +4350,8 @@
         </p:blipFill>
         <p:spPr>
           <a:xfrm>
-            <a:off x="6096000" y="1696760"/>
-            <a:ext cx="6095999" cy="2494551"/>
+            <a:off x="5954013" y="1669624"/>
+            <a:ext cx="6255812" cy="2624470"/>
           </a:xfrm>
           <a:prstGeom prst="rect">
             <a:avLst/>
